--- a/Documentation/LHO - M5 - Présentation.pptx
+++ b/Documentation/LHO - M5 - Présentation.pptx
@@ -267,7 +267,7 @@
       </p:grpSpPr>
       <p:sp>
         <p:nvSpPr>
-          <p:cNvPr id="1595081686" name="Google Shape;3;n"/>
+          <p:cNvPr id="2017866473" name="Google Shape;3;n"/>
           <p:cNvSpPr>
             <a:spLocks noChangeAspect="1" noGrp="1" noRot="1"/>
           </p:cNvSpPr>
@@ -318,7 +318,7 @@
       </p:sp>
       <p:sp>
         <p:nvSpPr>
-          <p:cNvPr id="2114745189" name="Google Shape;4;n"/>
+          <p:cNvPr id="1389348995" name="Google Shape;4;n"/>
           <p:cNvSpPr txBox="1">
             <a:spLocks noGrp="1"/>
           </p:cNvSpPr>
@@ -697,7 +697,7 @@
       </p:grpSpPr>
       <p:sp>
         <p:nvSpPr>
-          <p:cNvPr id="194373227" name="Google Shape;451;gd431007ba2_0_208:notes"/>
+          <p:cNvPr id="399282042" name="Google Shape;451;gd431007ba2_0_208:notes"/>
           <p:cNvSpPr>
             <a:spLocks noChangeAspect="1" noGrp="1" noRot="1"/>
           </p:cNvSpPr>
@@ -738,7 +738,7 @@
       </p:sp>
       <p:sp>
         <p:nvSpPr>
-          <p:cNvPr id="837337500" name="Google Shape;452;gd431007ba2_0_208:notes"/>
+          <p:cNvPr id="1338953038" name="Google Shape;452;gd431007ba2_0_208:notes"/>
           <p:cNvSpPr txBox="1">
             <a:spLocks noGrp="1"/>
           </p:cNvSpPr>
@@ -806,7 +806,7 @@
       </p:grpSpPr>
       <p:sp>
         <p:nvSpPr>
-          <p:cNvPr id="1524912282" name="Google Shape;488;gd431007ba2_0_215:notes"/>
+          <p:cNvPr id="43842349" name="Google Shape;488;gd431007ba2_0_215:notes"/>
           <p:cNvSpPr>
             <a:spLocks noChangeAspect="1" noGrp="1" noRot="1"/>
           </p:cNvSpPr>
@@ -847,7 +847,7 @@
       </p:sp>
       <p:sp>
         <p:nvSpPr>
-          <p:cNvPr id="1487583500" name="Google Shape;489;gd431007ba2_0_215:notes"/>
+          <p:cNvPr id="1060319534" name="Google Shape;489;gd431007ba2_0_215:notes"/>
           <p:cNvSpPr txBox="1">
             <a:spLocks noGrp="1"/>
           </p:cNvSpPr>
@@ -911,7 +911,7 @@
       </p:grpSpPr>
       <p:sp>
         <p:nvSpPr>
-          <p:cNvPr id="412373041" name="Google Shape;544;gec9722e163_0_121:notes"/>
+          <p:cNvPr id="161264355" name="Google Shape;544;gec9722e163_0_121:notes"/>
           <p:cNvSpPr>
             <a:spLocks noChangeAspect="1" noGrp="1" noRot="1"/>
           </p:cNvSpPr>
@@ -952,7 +952,7 @@
       </p:sp>
       <p:sp>
         <p:nvSpPr>
-          <p:cNvPr id="754909557" name="Google Shape;545;gec9722e163_0_121:notes"/>
+          <p:cNvPr id="1823779603" name="Google Shape;545;gec9722e163_0_121:notes"/>
           <p:cNvSpPr txBox="1">
             <a:spLocks noGrp="1"/>
           </p:cNvSpPr>
@@ -1016,7 +1016,7 @@
       </p:grpSpPr>
       <p:sp>
         <p:nvSpPr>
-          <p:cNvPr id="904990250" name="Google Shape;544;gec9722e163_0_121:notes"/>
+          <p:cNvPr id="1817369017" name="Google Shape;544;gec9722e163_0_121:notes"/>
           <p:cNvSpPr>
             <a:spLocks noChangeAspect="1" noGrp="1" noRot="1"/>
           </p:cNvSpPr>
@@ -1057,7 +1057,7 @@
       </p:sp>
       <p:sp>
         <p:nvSpPr>
-          <p:cNvPr id="1598480146" name="Google Shape;545;gec9722e163_0_121:notes"/>
+          <p:cNvPr id="2130119280" name="Google Shape;545;gec9722e163_0_121:notes"/>
           <p:cNvSpPr txBox="1">
             <a:spLocks noGrp="1"/>
           </p:cNvSpPr>
@@ -1121,7 +1121,7 @@
       </p:grpSpPr>
       <p:sp>
         <p:nvSpPr>
-          <p:cNvPr id="1444381937" name="Google Shape;526;g1dfe0b786a0_0_0:notes"/>
+          <p:cNvPr id="783352935" name="Google Shape;526;g1dfe0b786a0_0_0:notes"/>
           <p:cNvSpPr>
             <a:spLocks noChangeAspect="1" noGrp="1" noRot="1"/>
           </p:cNvSpPr>
@@ -1162,7 +1162,7 @@
       </p:sp>
       <p:sp>
         <p:nvSpPr>
-          <p:cNvPr id="529812391" name="Google Shape;527;g1dfe0b786a0_0_0:notes"/>
+          <p:cNvPr id="139822971" name="Google Shape;527;g1dfe0b786a0_0_0:notes"/>
           <p:cNvSpPr txBox="1">
             <a:spLocks noGrp="1"/>
           </p:cNvSpPr>
@@ -1226,7 +1226,7 @@
       </p:grpSpPr>
       <p:sp>
         <p:nvSpPr>
-          <p:cNvPr id="853282905" name="Google Shape;8183;g277303276c8_0_17475:notes"/>
+          <p:cNvPr id="1147585649" name="Google Shape;8183;g277303276c8_0_17475:notes"/>
           <p:cNvSpPr>
             <a:spLocks noChangeAspect="1" noGrp="1" noRot="1"/>
           </p:cNvSpPr>
@@ -1267,7 +1267,7 @@
       </p:sp>
       <p:sp>
         <p:nvSpPr>
-          <p:cNvPr id="1293789279" name="Google Shape;8184;g277303276c8_0_17475:notes"/>
+          <p:cNvPr id="1522933232" name="Google Shape;8184;g277303276c8_0_17475:notes"/>
           <p:cNvSpPr txBox="1">
             <a:spLocks noGrp="1"/>
           </p:cNvSpPr>
@@ -1331,7 +1331,7 @@
       </p:grpSpPr>
       <p:sp>
         <p:nvSpPr>
-          <p:cNvPr id="61222817" name="Google Shape;8183;g277303276c8_0_17475:notes"/>
+          <p:cNvPr id="2098862267" name="Google Shape;8183;g277303276c8_0_17475:notes"/>
           <p:cNvSpPr>
             <a:spLocks noChangeAspect="1" noGrp="1" noRot="1"/>
           </p:cNvSpPr>
@@ -1372,7 +1372,7 @@
       </p:sp>
       <p:sp>
         <p:nvSpPr>
-          <p:cNvPr id="135119980" name="Google Shape;8184;g277303276c8_0_17475:notes"/>
+          <p:cNvPr id="1113152666" name="Google Shape;8184;g277303276c8_0_17475:notes"/>
           <p:cNvSpPr txBox="1">
             <a:spLocks noGrp="1"/>
           </p:cNvSpPr>
@@ -1436,7 +1436,7 @@
       </p:grpSpPr>
       <p:sp>
         <p:nvSpPr>
-          <p:cNvPr id="54796940" name="Google Shape;8183;g277303276c8_0_17475:notes"/>
+          <p:cNvPr id="930051222" name="Google Shape;8183;g277303276c8_0_17475:notes"/>
           <p:cNvSpPr>
             <a:spLocks noChangeAspect="1" noGrp="1" noRot="1"/>
           </p:cNvSpPr>
@@ -1477,7 +1477,7 @@
       </p:sp>
       <p:sp>
         <p:nvSpPr>
-          <p:cNvPr id="213658924" name="Google Shape;8184;g277303276c8_0_17475:notes"/>
+          <p:cNvPr id="1668160686" name="Google Shape;8184;g277303276c8_0_17475:notes"/>
           <p:cNvSpPr txBox="1">
             <a:spLocks noGrp="1"/>
           </p:cNvSpPr>
@@ -1541,7 +1541,7 @@
       </p:grpSpPr>
       <p:sp>
         <p:nvSpPr>
-          <p:cNvPr id="2091510166" name="Google Shape;9;p2"/>
+          <p:cNvPr id="1048971518" name="Google Shape;9;p2"/>
           <p:cNvSpPr txBox="1">
             <a:spLocks noGrp="1"/>
           </p:cNvSpPr>
@@ -1673,7 +1673,7 @@
       </p:sp>
       <p:sp>
         <p:nvSpPr>
-          <p:cNvPr id="1971866645" name="Google Shape;10;p2"/>
+          <p:cNvPr id="336767377" name="Google Shape;10;p2"/>
           <p:cNvSpPr txBox="1">
             <a:spLocks noGrp="1"/>
           </p:cNvSpPr>
@@ -1833,7 +1833,7 @@
       </p:sp>
       <p:sp>
         <p:nvSpPr>
-          <p:cNvPr id="40916894" name="Google Shape;11;p2"/>
+          <p:cNvPr id="1199629537" name="Google Shape;11;p2"/>
           <p:cNvSpPr>
             <a:spLocks noGrp="1"/>
           </p:cNvSpPr>
@@ -1898,7 +1898,7 @@
       </p:grpSpPr>
       <p:sp>
         <p:nvSpPr>
-          <p:cNvPr id="1524777187" name="Google Shape;13;p3"/>
+          <p:cNvPr id="1282369812" name="Google Shape;13;p3"/>
           <p:cNvSpPr txBox="1">
             <a:spLocks noGrp="1"/>
           </p:cNvSpPr>
@@ -2030,7 +2030,7 @@
       </p:sp>
       <p:sp>
         <p:nvSpPr>
-          <p:cNvPr id="557193337" name="Google Shape;14;p3"/>
+          <p:cNvPr id="2070202462" name="Google Shape;14;p3"/>
           <p:cNvSpPr txBox="1">
             <a:spLocks noGrp="1"/>
           </p:cNvSpPr>
@@ -2169,7 +2169,7 @@
       </p:sp>
       <p:sp>
         <p:nvSpPr>
-          <p:cNvPr id="1477997341" name="Google Shape;15;p3"/>
+          <p:cNvPr id="302395089" name="Google Shape;15;p3"/>
           <p:cNvSpPr txBox="1">
             <a:spLocks noGrp="1"/>
           </p:cNvSpPr>
@@ -2325,7 +2325,7 @@
       </p:sp>
       <p:sp>
         <p:nvSpPr>
-          <p:cNvPr id="757957890" name="Google Shape;16;p3"/>
+          <p:cNvPr id="458652256" name="Google Shape;16;p3"/>
           <p:cNvSpPr>
             <a:spLocks noGrp="1"/>
           </p:cNvSpPr>
@@ -2355,7 +2355,7 @@
       </p:sp>
       <p:grpSp>
         <p:nvGrpSpPr>
-          <p:cNvPr id="318644049" name="Google Shape;17;p3"/>
+          <p:cNvPr id="28524169" name="Google Shape;17;p3"/>
           <p:cNvGrpSpPr/>
           <p:nvPr/>
         </p:nvGrpSpPr>
@@ -2805,7 +2805,7 @@
       </p:grpSpPr>
       <p:sp>
         <p:nvSpPr>
-          <p:cNvPr id="1506378723" name="Google Shape;64;p6"/>
+          <p:cNvPr id="1590498203" name="Google Shape;64;p6"/>
           <p:cNvSpPr txBox="1">
             <a:spLocks noGrp="1"/>
           </p:cNvSpPr>
@@ -2937,7 +2937,7 @@
       </p:sp>
       <p:grpSp>
         <p:nvGrpSpPr>
-          <p:cNvPr id="1332656644" name="Google Shape;65;p6"/>
+          <p:cNvPr id="498787914" name="Google Shape;65;p6"/>
           <p:cNvGrpSpPr/>
           <p:nvPr/>
         </p:nvGrpSpPr>
@@ -3619,7 +3619,7 @@
       </p:grpSpPr>
       <p:sp>
         <p:nvSpPr>
-          <p:cNvPr id="2014032834" name="Google Shape;159;p13"/>
+          <p:cNvPr id="359550198" name="Google Shape;159;p13"/>
           <p:cNvSpPr txBox="1">
             <a:spLocks noGrp="1"/>
           </p:cNvSpPr>
@@ -3751,7 +3751,7 @@
       </p:sp>
       <p:sp>
         <p:nvSpPr>
-          <p:cNvPr id="1770980383" name="Google Shape;160;p13"/>
+          <p:cNvPr id="1230296922" name="Google Shape;160;p13"/>
           <p:cNvSpPr txBox="1">
             <a:spLocks noGrp="1"/>
           </p:cNvSpPr>
@@ -3907,7 +3907,7 @@
       </p:sp>
       <p:sp>
         <p:nvSpPr>
-          <p:cNvPr id="1058058971" name="Google Shape;161;p13"/>
+          <p:cNvPr id="1799770460" name="Google Shape;161;p13"/>
           <p:cNvSpPr txBox="1">
             <a:spLocks noGrp="1"/>
           </p:cNvSpPr>
@@ -4063,7 +4063,7 @@
       </p:sp>
       <p:sp>
         <p:nvSpPr>
-          <p:cNvPr id="2033340933" name="Google Shape;162;p13"/>
+          <p:cNvPr id="1422408677" name="Google Shape;162;p13"/>
           <p:cNvSpPr txBox="1">
             <a:spLocks noGrp="1"/>
           </p:cNvSpPr>
@@ -4219,7 +4219,7 @@
       </p:sp>
       <p:sp>
         <p:nvSpPr>
-          <p:cNvPr id="62475282" name="Google Shape;163;p13"/>
+          <p:cNvPr id="1476469417" name="Google Shape;163;p13"/>
           <p:cNvSpPr txBox="1">
             <a:spLocks noGrp="1"/>
           </p:cNvSpPr>
@@ -4375,7 +4375,7 @@
       </p:sp>
       <p:sp>
         <p:nvSpPr>
-          <p:cNvPr id="453389288" name="Google Shape;164;p13"/>
+          <p:cNvPr id="584704885" name="Google Shape;164;p13"/>
           <p:cNvSpPr txBox="1">
             <a:spLocks noGrp="1"/>
           </p:cNvSpPr>
@@ -4573,7 +4573,7 @@
       </p:sp>
       <p:sp>
         <p:nvSpPr>
-          <p:cNvPr id="518487547" name="Google Shape;165;p13"/>
+          <p:cNvPr id="840208096" name="Google Shape;165;p13"/>
           <p:cNvSpPr txBox="1">
             <a:spLocks noGrp="1"/>
           </p:cNvSpPr>
@@ -4771,7 +4771,7 @@
       </p:sp>
       <p:sp>
         <p:nvSpPr>
-          <p:cNvPr id="1172952553" name="Google Shape;166;p13"/>
+          <p:cNvPr id="1334950164" name="Google Shape;166;p13"/>
           <p:cNvSpPr txBox="1">
             <a:spLocks noGrp="1"/>
           </p:cNvSpPr>
@@ -4969,7 +4969,7 @@
       </p:sp>
       <p:sp>
         <p:nvSpPr>
-          <p:cNvPr id="1854106412" name="Google Shape;167;p13"/>
+          <p:cNvPr id="1996097669" name="Google Shape;167;p13"/>
           <p:cNvSpPr txBox="1">
             <a:spLocks noGrp="1"/>
           </p:cNvSpPr>
@@ -5167,7 +5167,7 @@
       </p:sp>
       <p:sp>
         <p:nvSpPr>
-          <p:cNvPr id="71445080" name="Google Shape;168;p13"/>
+          <p:cNvPr id="1831753529" name="Google Shape;168;p13"/>
           <p:cNvSpPr txBox="1">
             <a:spLocks noGrp="1"/>
           </p:cNvSpPr>
@@ -5371,7 +5371,7 @@
       </p:sp>
       <p:sp>
         <p:nvSpPr>
-          <p:cNvPr id="2016908896" name="Google Shape;169;p13"/>
+          <p:cNvPr id="614722001" name="Google Shape;169;p13"/>
           <p:cNvSpPr txBox="1">
             <a:spLocks noGrp="1"/>
           </p:cNvSpPr>
@@ -5575,7 +5575,7 @@
       </p:sp>
       <p:sp>
         <p:nvSpPr>
-          <p:cNvPr id="111117768" name="Google Shape;170;p13"/>
+          <p:cNvPr id="1915630510" name="Google Shape;170;p13"/>
           <p:cNvSpPr txBox="1">
             <a:spLocks noGrp="1"/>
           </p:cNvSpPr>
@@ -5779,7 +5779,7 @@
       </p:sp>
       <p:sp>
         <p:nvSpPr>
-          <p:cNvPr id="476025591" name="Google Shape;171;p13"/>
+          <p:cNvPr id="2143071855" name="Google Shape;171;p13"/>
           <p:cNvSpPr txBox="1">
             <a:spLocks noGrp="1"/>
           </p:cNvSpPr>
@@ -5983,7 +5983,7 @@
       </p:sp>
       <p:grpSp>
         <p:nvGrpSpPr>
-          <p:cNvPr id="1986102319" name="Google Shape;172;p13"/>
+          <p:cNvPr id="1472468309" name="Google Shape;172;p13"/>
           <p:cNvGrpSpPr/>
           <p:nvPr/>
         </p:nvGrpSpPr>
@@ -6253,7 +6253,7 @@
       </p:grpSpPr>
       <p:grpSp>
         <p:nvGrpSpPr>
-          <p:cNvPr id="2001571802" name="Google Shape;409;p25"/>
+          <p:cNvPr id="981492176" name="Google Shape;409;p25"/>
           <p:cNvGrpSpPr/>
           <p:nvPr/>
         </p:nvGrpSpPr>
@@ -6905,7 +6905,7 @@
       </p:grpSpPr>
       <p:grpSp>
         <p:nvGrpSpPr>
-          <p:cNvPr id="2101594238" name="Google Shape;427;p26"/>
+          <p:cNvPr id="182987911" name="Google Shape;427;p26"/>
           <p:cNvGrpSpPr/>
           <p:nvPr/>
         </p:nvGrpSpPr>
@@ -7589,7 +7589,7 @@
       </p:grpSpPr>
       <p:sp>
         <p:nvSpPr>
-          <p:cNvPr id="1690630359" name="Google Shape;6;p1"/>
+          <p:cNvPr id="634927487" name="Google Shape;6;p1"/>
           <p:cNvSpPr txBox="1">
             <a:spLocks noGrp="1"/>
           </p:cNvSpPr>
@@ -7824,7 +7824,7 @@
       </p:sp>
       <p:sp>
         <p:nvSpPr>
-          <p:cNvPr id="2088978743" name="Google Shape;7;p1"/>
+          <p:cNvPr id="1322048674" name="Google Shape;7;p1"/>
           <p:cNvSpPr txBox="1">
             <a:spLocks noGrp="1"/>
           </p:cNvSpPr>
@@ -8788,7 +8788,7 @@
       </p:grpSpPr>
       <p:sp>
         <p:nvSpPr>
-          <p:cNvPr id="974139994" name="Google Shape;445;p27"/>
+          <p:cNvPr id="1134612486" name="Google Shape;445;p27"/>
           <p:cNvSpPr txBox="1">
             <a:spLocks noGrp="1"/>
           </p:cNvSpPr>
@@ -9023,7 +9023,7 @@
       </p:sp>
       <p:sp>
         <p:nvSpPr>
-          <p:cNvPr id="1294884575" name="Google Shape;446;p27"/>
+          <p:cNvPr id="227635329" name="Google Shape;446;p27"/>
           <p:cNvSpPr txBox="1">
             <a:spLocks noGrp="1"/>
           </p:cNvSpPr>
@@ -9974,7 +9974,7 @@
       </p:grpSpPr>
       <p:sp>
         <p:nvSpPr>
-          <p:cNvPr id="635286081" name="Google Shape;454;p30"/>
+          <p:cNvPr id="572882526" name="Google Shape;454;p30"/>
           <p:cNvSpPr txBox="1">
             <a:spLocks noGrp="1"/>
           </p:cNvSpPr>
@@ -10049,7 +10049,7 @@
       </p:sp>
       <p:sp>
         <p:nvSpPr>
-          <p:cNvPr id="326969075" name="Google Shape;455;p30"/>
+          <p:cNvPr id="1014846900" name="Google Shape;455;p30"/>
           <p:cNvSpPr txBox="1">
             <a:spLocks noGrp="1"/>
           </p:cNvSpPr>
@@ -10077,7 +10077,7 @@
             </a:pPr>
             <a:r>
               <a:rPr lang="fr-CH"/>
-              <a:t>17.06.13 - Hofer Lukas - TINF2</a:t>
+              <a:t>26.06.13 - Hofer Lukas - TINF2</a:t>
             </a:r>
             <a:endParaRPr/>
           </a:p>
@@ -10085,7 +10085,7 @@
       </p:sp>
       <p:grpSp>
         <p:nvGrpSpPr>
-          <p:cNvPr id="955727879" name="Google Shape;456;p30"/>
+          <p:cNvPr id="1272996691" name="Google Shape;456;p30"/>
           <p:cNvGrpSpPr/>
           <p:nvPr/>
         </p:nvGrpSpPr>
@@ -10356,7 +10356,7 @@
       </p:grpSp>
       <p:grpSp>
         <p:nvGrpSpPr>
-          <p:cNvPr id="1781414087" name="Google Shape;463;p30"/>
+          <p:cNvPr id="922289310" name="Google Shape;463;p30"/>
           <p:cNvGrpSpPr/>
           <p:nvPr/>
         </p:nvGrpSpPr>
@@ -10781,7 +10781,7 @@
       </p:grpSp>
       <p:pic>
         <p:nvPicPr>
-          <p:cNvPr id="1282946650" name="Google Shape;474;p30"/>
+          <p:cNvPr id="740223674" name="Google Shape;474;p30"/>
           <p:cNvPicPr>
             <a:picLocks noGrp="1"/>
           </p:cNvPicPr>
@@ -10805,7 +10805,7 @@
       </p:pic>
       <p:grpSp>
         <p:nvGrpSpPr>
-          <p:cNvPr id="1213916532" name="Google Shape;475;p30"/>
+          <p:cNvPr id="1030979467" name="Google Shape;475;p30"/>
           <p:cNvGrpSpPr/>
           <p:nvPr/>
         </p:nvGrpSpPr>
@@ -10941,7 +10941,7 @@
       </p:grpSpPr>
       <p:sp>
         <p:nvSpPr>
-          <p:cNvPr id="480157952" name="Google Shape;491;p32"/>
+          <p:cNvPr id="543634711" name="Google Shape;491;p32"/>
           <p:cNvSpPr txBox="1">
             <a:spLocks noGrp="1"/>
           </p:cNvSpPr>
@@ -10977,7 +10977,7 @@
       </p:sp>
       <p:sp>
         <p:nvSpPr>
-          <p:cNvPr id="971178695" name="Google Shape;485;p31"/>
+          <p:cNvPr id="1248797066" name="Google Shape;485;p31"/>
           <p:cNvSpPr txBox="1"/>
           <p:nvPr/>
         </p:nvSpPr>
@@ -11034,7 +11034,7 @@
       </p:sp>
       <p:grpSp>
         <p:nvGrpSpPr>
-          <p:cNvPr id="329879711" name="Groupe 17"/>
+          <p:cNvPr id="1817306361" name="Groupe 17"/>
           <p:cNvGrpSpPr/>
           <p:nvPr/>
         </p:nvGrpSpPr>
@@ -11601,7 +11601,7 @@
       </p:grpSp>
       <p:grpSp>
         <p:nvGrpSpPr>
-          <p:cNvPr id="805676674" name="Groupe 18"/>
+          <p:cNvPr id="98518182" name="Groupe 18"/>
           <p:cNvGrpSpPr/>
           <p:nvPr/>
         </p:nvGrpSpPr>
@@ -12168,7 +12168,7 @@
       </p:grpSp>
       <p:grpSp>
         <p:nvGrpSpPr>
-          <p:cNvPr id="1536857106" name="Groupe 19"/>
+          <p:cNvPr id="1992061647" name="Groupe 19"/>
           <p:cNvGrpSpPr/>
           <p:nvPr/>
         </p:nvGrpSpPr>
@@ -12735,7 +12735,7 @@
       </p:grpSp>
       <p:grpSp>
         <p:nvGrpSpPr>
-          <p:cNvPr id="9327541" name="Groupe 12"/>
+          <p:cNvPr id="674765216" name="Groupe 12"/>
           <p:cNvGrpSpPr/>
           <p:nvPr/>
         </p:nvGrpSpPr>
@@ -13302,7 +13302,7 @@
       </p:grpSp>
       <p:grpSp>
         <p:nvGrpSpPr>
-          <p:cNvPr id="1325493887" name="Groupe 13"/>
+          <p:cNvPr id="391081952" name="Groupe 13"/>
           <p:cNvGrpSpPr/>
           <p:nvPr/>
         </p:nvGrpSpPr>
@@ -13869,7 +13869,7 @@
       </p:grpSp>
       <p:grpSp>
         <p:nvGrpSpPr>
-          <p:cNvPr id="701558643" name="Groupe 14"/>
+          <p:cNvPr id="3573316" name="Groupe 14"/>
           <p:cNvGrpSpPr/>
           <p:nvPr/>
         </p:nvGrpSpPr>
@@ -14436,7 +14436,7 @@
       </p:grpSp>
       <p:grpSp>
         <p:nvGrpSpPr>
-          <p:cNvPr id="2002535321" name="Groupe 15"/>
+          <p:cNvPr id="408416946" name="Groupe 15"/>
           <p:cNvGrpSpPr/>
           <p:nvPr/>
         </p:nvGrpSpPr>
@@ -15003,7 +15003,7 @@
       </p:grpSp>
       <p:grpSp>
         <p:nvGrpSpPr>
-          <p:cNvPr id="57883044" name="Groupe 16"/>
+          <p:cNvPr id="1878989132" name="Groupe 16"/>
           <p:cNvGrpSpPr/>
           <p:nvPr/>
         </p:nvGrpSpPr>
@@ -15603,7 +15603,7 @@
       </p:grpSpPr>
       <p:sp>
         <p:nvSpPr>
-          <p:cNvPr id="862638964" name="Google Shape;536;p35"/>
+          <p:cNvPr id="239403588" name="Google Shape;536;p35"/>
           <p:cNvSpPr txBox="1">
             <a:spLocks noGrp="1"/>
           </p:cNvSpPr>
@@ -15643,7 +15643,7 @@
       </p:sp>
       <p:sp>
         <p:nvSpPr>
-          <p:cNvPr id="1645795388" name="Google Shape;538;p35"/>
+          <p:cNvPr id="823150496" name="Google Shape;538;p35"/>
           <p:cNvSpPr txBox="1"/>
           <p:nvPr/>
         </p:nvSpPr>
@@ -15913,7 +15913,7 @@
       </p:sp>
       <p:sp>
         <p:nvSpPr>
-          <p:cNvPr id="2113911976" name="Google Shape;537;p35"/>
+          <p:cNvPr id="1912932472" name="Google Shape;537;p35"/>
           <p:cNvSpPr txBox="1"/>
           <p:nvPr/>
         </p:nvSpPr>
@@ -16207,7 +16207,7 @@
       </p:sp>
       <p:sp>
         <p:nvSpPr>
-          <p:cNvPr id="418370090" name="Google Shape;537;p35"/>
+          <p:cNvPr id="611398426" name="Google Shape;537;p35"/>
           <p:cNvSpPr txBox="1"/>
           <p:nvPr/>
         </p:nvSpPr>
@@ -16498,7 +16498,7 @@
       </p:grpSpPr>
       <p:sp>
         <p:nvSpPr>
-          <p:cNvPr id="1228346117" name="Google Shape;536;p35"/>
+          <p:cNvPr id="840548916" name="Google Shape;536;p35"/>
           <p:cNvSpPr txBox="1">
             <a:spLocks noGrp="1"/>
           </p:cNvSpPr>
@@ -16538,7 +16538,7 @@
       </p:sp>
       <p:sp>
         <p:nvSpPr>
-          <p:cNvPr id="1273717048" name="Google Shape;538;p35"/>
+          <p:cNvPr id="1271116073" name="Google Shape;538;p35"/>
           <p:cNvSpPr txBox="1"/>
           <p:nvPr/>
         </p:nvSpPr>
@@ -16798,7 +16798,7 @@
       </p:sp>
       <p:sp>
         <p:nvSpPr>
-          <p:cNvPr id="1254692316" name="Google Shape;537;p35"/>
+          <p:cNvPr id="1003396045" name="Google Shape;537;p35"/>
           <p:cNvSpPr txBox="1"/>
           <p:nvPr/>
         </p:nvSpPr>
@@ -17092,7 +17092,7 @@
       </p:sp>
       <p:sp>
         <p:nvSpPr>
-          <p:cNvPr id="482585448" name="Google Shape;537;p35"/>
+          <p:cNvPr id="2024684349" name="Google Shape;537;p35"/>
           <p:cNvSpPr txBox="1"/>
           <p:nvPr/>
         </p:nvSpPr>
@@ -17383,7 +17383,7 @@
       </p:grpSpPr>
       <p:grpSp>
         <p:nvGrpSpPr>
-          <p:cNvPr id="797582798" name="Google Shape;529;p35"/>
+          <p:cNvPr id="1682760400" name="Google Shape;529;p35"/>
           <p:cNvGrpSpPr/>
           <p:nvPr/>
         </p:nvGrpSpPr>
@@ -17656,7 +17656,7 @@
       </p:grpSp>
       <p:sp>
         <p:nvSpPr>
-          <p:cNvPr id="1511774570" name="Google Shape;536;p35"/>
+          <p:cNvPr id="1121212156" name="Google Shape;536;p35"/>
           <p:cNvSpPr txBox="1">
             <a:spLocks noGrp="1"/>
           </p:cNvSpPr>
@@ -17692,7 +17692,7 @@
       </p:sp>
       <p:sp>
         <p:nvSpPr>
-          <p:cNvPr id="1326381679" name="Google Shape;537;p35"/>
+          <p:cNvPr id="1729727829" name="Google Shape;537;p35"/>
           <p:cNvSpPr txBox="1">
             <a:spLocks noGrp="1"/>
           </p:cNvSpPr>
@@ -17780,7 +17780,7 @@
       </p:sp>
       <p:sp>
         <p:nvSpPr>
-          <p:cNvPr id="924712652" name="Google Shape;538;p35"/>
+          <p:cNvPr id="798734486" name="Google Shape;538;p35"/>
           <p:cNvSpPr txBox="1">
             <a:spLocks noGrp="1"/>
           </p:cNvSpPr>
@@ -17839,7 +17839,7 @@
       </p:sp>
       <p:grpSp>
         <p:nvGrpSpPr>
-          <p:cNvPr id="69640357" name="Google Shape;540;p35"/>
+          <p:cNvPr id="1137317848" name="Google Shape;540;p35"/>
           <p:cNvGrpSpPr/>
           <p:nvPr/>
         </p:nvGrpSpPr>
@@ -17940,7 +17940,7 @@
       </p:grpSp>
       <p:sp>
         <p:nvSpPr>
-          <p:cNvPr id="529003927" name="Google Shape;537;p35"/>
+          <p:cNvPr id="813168246" name="Google Shape;537;p35"/>
           <p:cNvSpPr txBox="1"/>
           <p:nvPr/>
         </p:nvSpPr>
@@ -18264,7 +18264,7 @@
       </p:sp>
       <p:sp>
         <p:nvSpPr>
-          <p:cNvPr id="1393178788" name="Google Shape;537;p35"/>
+          <p:cNvPr id="762511961" name="Google Shape;537;p35"/>
           <p:cNvSpPr txBox="1"/>
           <p:nvPr/>
         </p:nvSpPr>
@@ -18554,7 +18554,7 @@
       </p:sp>
       <p:sp>
         <p:nvSpPr>
-          <p:cNvPr id="1189652411" name="Google Shape;5212;p68"/>
+          <p:cNvPr id="765830447" name="Google Shape;5212;p68"/>
           <p:cNvSpPr/>
           <p:nvPr/>
         </p:nvSpPr>
@@ -18813,7 +18813,7 @@
       </p:sp>
       <p:grpSp>
         <p:nvGrpSpPr>
-          <p:cNvPr id="1054657596" name="Google Shape;5940;p70"/>
+          <p:cNvPr id="765071983" name="Google Shape;5940;p70"/>
           <p:cNvGrpSpPr/>
           <p:nvPr/>
         </p:nvGrpSpPr>
@@ -19228,7 +19228,7 @@
       </p:grpSp>
       <p:grpSp>
         <p:nvGrpSpPr>
-          <p:cNvPr id="1078752045" name="Google Shape;5213;p68"/>
+          <p:cNvPr id="1373429779" name="Google Shape;5213;p68"/>
           <p:cNvGrpSpPr/>
           <p:nvPr/>
         </p:nvGrpSpPr>
@@ -19447,7 +19447,7 @@
       </p:grpSpPr>
       <p:sp>
         <p:nvSpPr>
-          <p:cNvPr id="223392290" name="Google Shape;454;p30"/>
+          <p:cNvPr id="1471216704" name="Google Shape;454;p30"/>
           <p:cNvSpPr txBox="1"/>
           <p:nvPr/>
         </p:nvSpPr>
@@ -19712,7 +19712,7 @@
       </p:sp>
       <p:sp>
         <p:nvSpPr>
-          <p:cNvPr id="667776383" name="Google Shape;538;p35"/>
+          <p:cNvPr id="326193362" name="Google Shape;538;p35"/>
           <p:cNvSpPr txBox="1"/>
           <p:nvPr/>
         </p:nvSpPr>
@@ -20028,7 +20028,7 @@
       </p:grpSpPr>
       <p:sp>
         <p:nvSpPr>
-          <p:cNvPr id="1709463963" name="Google Shape;454;p30"/>
+          <p:cNvPr id="689485630" name="Google Shape;454;p30"/>
           <p:cNvSpPr txBox="1"/>
           <p:nvPr/>
         </p:nvSpPr>
